--- a/doc/开发文档/合规精灵工作管理.pptx
+++ b/doc/开发文档/合规精灵工作管理.pptx
@@ -4209,11 +4209,11 @@
             </a:r>
             <a:r>
               <a:rPr lang="zh-CN" altLang="en-US"/>
-              <a:t>人）（张家禾、杨沁雨、</a:t>
+              <a:t>人）（张家禾、杨沁雨、杨智予、</a:t>
             </a:r>
             <a:r>
               <a:rPr lang="zh-CN" altLang="en-US"/>
-              <a:t>杨智予）</a:t>
+              <a:t>康曼栖）</a:t>
             </a:r>
             <a:endParaRPr lang="zh-CN" altLang="en-US"/>
           </a:p>
